--- a/Hoyne_ANA500_MicroProj1.pptx
+++ b/Hoyne_ANA500_MicroProj1.pptx
@@ -117,204 +117,6 @@
     </p:ext>
   </p:extLst>
 </p:presentation>
-</file>
-
-<file path=ppt/revisionInfo.xml><?xml version="1.0" encoding="utf-8"?>
-<p1510:revInfo xmlns:a="http://schemas.openxmlformats.org/drawingml/2006/main" xmlns:r="http://schemas.openxmlformats.org/officeDocument/2006/relationships" xmlns:p1510="http://schemas.microsoft.com/office/powerpoint/2015/10/main">
-  <p1510:revLst>
-    <p1510:client id="{22900701-4350-46B0-B667-6B406B94FF7B}" v="3" dt="2022-03-01T23:50:13.388"/>
-  </p1510:revLst>
-</p1510:revInfo>
-</file>
-
-<file path=ppt/changesInfos/changesInfo1.xml><?xml version="1.0" encoding="utf-8"?>
-<pc:chgInfo xmlns:a="http://schemas.openxmlformats.org/drawingml/2006/main" xmlns:r="http://schemas.openxmlformats.org/officeDocument/2006/relationships" xmlns:ac="http://schemas.microsoft.com/office/drawing/2013/main/command" xmlns:pc="http://schemas.microsoft.com/office/powerpoint/2013/main/command">
-  <pc:docChgLst>
-    <pc:chgData name="Emmanuel J Rodriguez" userId="2e21cfcd93492766" providerId="LiveId" clId="{22900701-4350-46B0-B667-6B406B94FF7B}"/>
-    <pc:docChg chg="custSel addSld modSld">
-      <pc:chgData name="Emmanuel J Rodriguez" userId="2e21cfcd93492766" providerId="LiveId" clId="{22900701-4350-46B0-B667-6B406B94FF7B}" dt="2022-03-01T23:50:57.963" v="172" actId="20577"/>
-      <pc:docMkLst>
-        <pc:docMk/>
-      </pc:docMkLst>
-      <pc:sldChg chg="modSp mod">
-        <pc:chgData name="Emmanuel J Rodriguez" userId="2e21cfcd93492766" providerId="LiveId" clId="{22900701-4350-46B0-B667-6B406B94FF7B}" dt="2022-03-01T23:23:22.375" v="31" actId="20577"/>
-        <pc:sldMkLst>
-          <pc:docMk/>
-          <pc:sldMk cId="3651251486" sldId="256"/>
-        </pc:sldMkLst>
-        <pc:spChg chg="mod">
-          <ac:chgData name="Emmanuel J Rodriguez" userId="2e21cfcd93492766" providerId="LiveId" clId="{22900701-4350-46B0-B667-6B406B94FF7B}" dt="2022-03-01T23:23:22.375" v="31" actId="20577"/>
-          <ac:spMkLst>
-            <pc:docMk/>
-            <pc:sldMk cId="3651251486" sldId="256"/>
-            <ac:spMk id="2" creationId="{9FEFD3DB-B193-4E72-861B-FE835A2E1FAD}"/>
-          </ac:spMkLst>
-        </pc:spChg>
-      </pc:sldChg>
-      <pc:sldChg chg="modSp mod">
-        <pc:chgData name="Emmanuel J Rodriguez" userId="2e21cfcd93492766" providerId="LiveId" clId="{22900701-4350-46B0-B667-6B406B94FF7B}" dt="2022-03-01T23:47:58.759" v="95" actId="20577"/>
-        <pc:sldMkLst>
-          <pc:docMk/>
-          <pc:sldMk cId="1880678406" sldId="257"/>
-        </pc:sldMkLst>
-        <pc:spChg chg="mod">
-          <ac:chgData name="Emmanuel J Rodriguez" userId="2e21cfcd93492766" providerId="LiveId" clId="{22900701-4350-46B0-B667-6B406B94FF7B}" dt="2022-03-01T23:33:50.150" v="54" actId="20577"/>
-          <ac:spMkLst>
-            <pc:docMk/>
-            <pc:sldMk cId="1880678406" sldId="257"/>
-            <ac:spMk id="2" creationId="{8B8302AB-CEDA-4E89-A1DC-6BABC9C3F7D4}"/>
-          </ac:spMkLst>
-        </pc:spChg>
-        <pc:spChg chg="mod">
-          <ac:chgData name="Emmanuel J Rodriguez" userId="2e21cfcd93492766" providerId="LiveId" clId="{22900701-4350-46B0-B667-6B406B94FF7B}" dt="2022-03-01T23:47:58.759" v="95" actId="20577"/>
-          <ac:spMkLst>
-            <pc:docMk/>
-            <pc:sldMk cId="1880678406" sldId="257"/>
-            <ac:spMk id="3" creationId="{05AD07EA-4B74-4BFA-A23D-5147B6A28FC4}"/>
-          </ac:spMkLst>
-        </pc:spChg>
-      </pc:sldChg>
-      <pc:sldChg chg="modSp new mod">
-        <pc:chgData name="Emmanuel J Rodriguez" userId="2e21cfcd93492766" providerId="LiveId" clId="{22900701-4350-46B0-B667-6B406B94FF7B}" dt="2022-03-01T23:47:53.999" v="93" actId="20577"/>
-        <pc:sldMkLst>
-          <pc:docMk/>
-          <pc:sldMk cId="3306958798" sldId="258"/>
-        </pc:sldMkLst>
-        <pc:spChg chg="mod">
-          <ac:chgData name="Emmanuel J Rodriguez" userId="2e21cfcd93492766" providerId="LiveId" clId="{22900701-4350-46B0-B667-6B406B94FF7B}" dt="2022-03-01T23:34:18.821" v="86" actId="20577"/>
-          <ac:spMkLst>
-            <pc:docMk/>
-            <pc:sldMk cId="3306958798" sldId="258"/>
-            <ac:spMk id="2" creationId="{FF29C91F-7913-4D5C-A911-ADD4837DAA00}"/>
-          </ac:spMkLst>
-        </pc:spChg>
-        <pc:spChg chg="mod">
-          <ac:chgData name="Emmanuel J Rodriguez" userId="2e21cfcd93492766" providerId="LiveId" clId="{22900701-4350-46B0-B667-6B406B94FF7B}" dt="2022-03-01T23:47:53.999" v="93" actId="20577"/>
-          <ac:spMkLst>
-            <pc:docMk/>
-            <pc:sldMk cId="3306958798" sldId="258"/>
-            <ac:spMk id="3" creationId="{905A42CE-FCD3-41B9-A629-5F3C6031F3C0}"/>
-          </ac:spMkLst>
-        </pc:spChg>
-      </pc:sldChg>
-      <pc:sldChg chg="modSp new mod">
-        <pc:chgData name="Emmanuel J Rodriguez" userId="2e21cfcd93492766" providerId="LiveId" clId="{22900701-4350-46B0-B667-6B406B94FF7B}" dt="2022-03-01T23:49:17.883" v="106" actId="20577"/>
-        <pc:sldMkLst>
-          <pc:docMk/>
-          <pc:sldMk cId="427023157" sldId="259"/>
-        </pc:sldMkLst>
-        <pc:spChg chg="mod">
-          <ac:chgData name="Emmanuel J Rodriguez" userId="2e21cfcd93492766" providerId="LiveId" clId="{22900701-4350-46B0-B667-6B406B94FF7B}" dt="2022-03-01T23:49:03.966" v="103" actId="20577"/>
-          <ac:spMkLst>
-            <pc:docMk/>
-            <pc:sldMk cId="427023157" sldId="259"/>
-            <ac:spMk id="2" creationId="{DB2A7252-6823-44F9-B464-D7A15D12BB65}"/>
-          </ac:spMkLst>
-        </pc:spChg>
-        <pc:spChg chg="mod">
-          <ac:chgData name="Emmanuel J Rodriguez" userId="2e21cfcd93492766" providerId="LiveId" clId="{22900701-4350-46B0-B667-6B406B94FF7B}" dt="2022-03-01T23:49:17.883" v="106" actId="20577"/>
-          <ac:spMkLst>
-            <pc:docMk/>
-            <pc:sldMk cId="427023157" sldId="259"/>
-            <ac:spMk id="3" creationId="{7FEAE391-6366-4E20-A14E-0ECFAEA8029A}"/>
-          </ac:spMkLst>
-        </pc:spChg>
-      </pc:sldChg>
-      <pc:sldChg chg="modSp add mod">
-        <pc:chgData name="Emmanuel J Rodriguez" userId="2e21cfcd93492766" providerId="LiveId" clId="{22900701-4350-46B0-B667-6B406B94FF7B}" dt="2022-03-01T23:49:42.228" v="115"/>
-        <pc:sldMkLst>
-          <pc:docMk/>
-          <pc:sldMk cId="2788217980" sldId="260"/>
-        </pc:sldMkLst>
-        <pc:spChg chg="mod">
-          <ac:chgData name="Emmanuel J Rodriguez" userId="2e21cfcd93492766" providerId="LiveId" clId="{22900701-4350-46B0-B667-6B406B94FF7B}" dt="2022-03-01T23:49:29.569" v="114" actId="20577"/>
-          <ac:spMkLst>
-            <pc:docMk/>
-            <pc:sldMk cId="2788217980" sldId="260"/>
-            <ac:spMk id="2" creationId="{DB2A7252-6823-44F9-B464-D7A15D12BB65}"/>
-          </ac:spMkLst>
-        </pc:spChg>
-        <pc:spChg chg="mod">
-          <ac:chgData name="Emmanuel J Rodriguez" userId="2e21cfcd93492766" providerId="LiveId" clId="{22900701-4350-46B0-B667-6B406B94FF7B}" dt="2022-03-01T23:49:42.228" v="115"/>
-          <ac:spMkLst>
-            <pc:docMk/>
-            <pc:sldMk cId="2788217980" sldId="260"/>
-            <ac:spMk id="3" creationId="{7FEAE391-6366-4E20-A14E-0ECFAEA8029A}"/>
-          </ac:spMkLst>
-        </pc:spChg>
-      </pc:sldChg>
-      <pc:sldChg chg="modSp add mod">
-        <pc:chgData name="Emmanuel J Rodriguez" userId="2e21cfcd93492766" providerId="LiveId" clId="{22900701-4350-46B0-B667-6B406B94FF7B}" dt="2022-03-01T23:50:09.797" v="129"/>
-        <pc:sldMkLst>
-          <pc:docMk/>
-          <pc:sldMk cId="69798042" sldId="261"/>
-        </pc:sldMkLst>
-        <pc:spChg chg="mod">
-          <ac:chgData name="Emmanuel J Rodriguez" userId="2e21cfcd93492766" providerId="LiveId" clId="{22900701-4350-46B0-B667-6B406B94FF7B}" dt="2022-03-01T23:49:54.235" v="128" actId="20577"/>
-          <ac:spMkLst>
-            <pc:docMk/>
-            <pc:sldMk cId="69798042" sldId="261"/>
-            <ac:spMk id="2" creationId="{DB2A7252-6823-44F9-B464-D7A15D12BB65}"/>
-          </ac:spMkLst>
-        </pc:spChg>
-        <pc:spChg chg="mod">
-          <ac:chgData name="Emmanuel J Rodriguez" userId="2e21cfcd93492766" providerId="LiveId" clId="{22900701-4350-46B0-B667-6B406B94FF7B}" dt="2022-03-01T23:50:09.797" v="129"/>
-          <ac:spMkLst>
-            <pc:docMk/>
-            <pc:sldMk cId="69798042" sldId="261"/>
-            <ac:spMk id="3" creationId="{7FEAE391-6366-4E20-A14E-0ECFAEA8029A}"/>
-          </ac:spMkLst>
-        </pc:spChg>
-      </pc:sldChg>
-      <pc:sldChg chg="modSp add mod">
-        <pc:chgData name="Emmanuel J Rodriguez" userId="2e21cfcd93492766" providerId="LiveId" clId="{22900701-4350-46B0-B667-6B406B94FF7B}" dt="2022-03-01T23:50:29.416" v="157" actId="20577"/>
-        <pc:sldMkLst>
-          <pc:docMk/>
-          <pc:sldMk cId="2309908418" sldId="262"/>
-        </pc:sldMkLst>
-        <pc:spChg chg="mod">
-          <ac:chgData name="Emmanuel J Rodriguez" userId="2e21cfcd93492766" providerId="LiveId" clId="{22900701-4350-46B0-B667-6B406B94FF7B}" dt="2022-03-01T23:50:18.324" v="136" actId="20577"/>
-          <ac:spMkLst>
-            <pc:docMk/>
-            <pc:sldMk cId="2309908418" sldId="262"/>
-            <ac:spMk id="2" creationId="{DB2A7252-6823-44F9-B464-D7A15D12BB65}"/>
-          </ac:spMkLst>
-        </pc:spChg>
-        <pc:spChg chg="mod">
-          <ac:chgData name="Emmanuel J Rodriguez" userId="2e21cfcd93492766" providerId="LiveId" clId="{22900701-4350-46B0-B667-6B406B94FF7B}" dt="2022-03-01T23:50:29.416" v="157" actId="20577"/>
-          <ac:spMkLst>
-            <pc:docMk/>
-            <pc:sldMk cId="2309908418" sldId="262"/>
-            <ac:spMk id="3" creationId="{7FEAE391-6366-4E20-A14E-0ECFAEA8029A}"/>
-          </ac:spMkLst>
-        </pc:spChg>
-      </pc:sldChg>
-      <pc:sldChg chg="modSp new mod">
-        <pc:chgData name="Emmanuel J Rodriguez" userId="2e21cfcd93492766" providerId="LiveId" clId="{22900701-4350-46B0-B667-6B406B94FF7B}" dt="2022-03-01T23:50:57.963" v="172" actId="20577"/>
-        <pc:sldMkLst>
-          <pc:docMk/>
-          <pc:sldMk cId="4024108741" sldId="263"/>
-        </pc:sldMkLst>
-        <pc:spChg chg="mod">
-          <ac:chgData name="Emmanuel J Rodriguez" userId="2e21cfcd93492766" providerId="LiveId" clId="{22900701-4350-46B0-B667-6B406B94FF7B}" dt="2022-03-01T23:50:35.471" v="161" actId="20577"/>
-          <ac:spMkLst>
-            <pc:docMk/>
-            <pc:sldMk cId="4024108741" sldId="263"/>
-            <ac:spMk id="2" creationId="{7998C1A2-E365-4EAD-A777-10EF9BD2588C}"/>
-          </ac:spMkLst>
-        </pc:spChg>
-        <pc:spChg chg="mod">
-          <ac:chgData name="Emmanuel J Rodriguez" userId="2e21cfcd93492766" providerId="LiveId" clId="{22900701-4350-46B0-B667-6B406B94FF7B}" dt="2022-03-01T23:50:57.963" v="172" actId="20577"/>
-          <ac:spMkLst>
-            <pc:docMk/>
-            <pc:sldMk cId="4024108741" sldId="263"/>
-            <ac:spMk id="3" creationId="{83DC0D0A-FDCC-4561-A8EB-1F836A94AACC}"/>
-          </ac:spMkLst>
-        </pc:spChg>
-      </pc:sldChg>
-    </pc:docChg>
-  </pc:docChgLst>
-</pc:chgInfo>
 </file>
 
 <file path=ppt/slideLayouts/slideLayout1.xml><?xml version="1.0" encoding="utf-8"?>
